--- a/lecons/LSA/Climatology/LSA_CLIM_L04_The_Earth_s_Radiation_Balance.pptx
+++ b/lecons/LSA/Climatology/LSA_CLIM_L04_The_Earth_s_Radiation_Balance.pptx
@@ -2935,7 +2935,7 @@
           <a:p>
             <a:r>
               <a:rPr lang="en-US" dirty="0"/>
-              <a:t>Let us copy DEFINITIONS. The key terms of this lesson are defined as follows. Write each point on a new line, with the key term first. When you finish, we go to the next slide.</a:t>
+              <a:t>Let us copy the definitions. The key terms of this lesson are defined as follows. On this slide we have Heat budget and Terrestrial radiation. Write each point on a new line, with the key term first, and explain it in your own words when we revise. When you finish, we go to the next slide.</a:t>
             </a:r>
             <a:endParaRPr lang="en-US" dirty="0"/>
           </a:p>
@@ -3023,7 +3023,7 @@
           <a:p>
             <a:r>
               <a:rPr lang="en-US" dirty="0"/>
-              <a:t>We continue with the same part. Write each point on a new line, with the key term first.</a:t>
+              <a:t>We continue with the definitions. On this slide we have Net radiation. Write each point on a new line, with the key term first, and explain it in your own words when we revise.</a:t>
             </a:r>
             <a:endParaRPr lang="en-US" dirty="0"/>
           </a:p>
@@ -3111,7 +3111,7 @@
           <a:p>
             <a:r>
               <a:rPr lang="en-US" dirty="0"/>
-              <a:t>Let us copy The Global Heat Budget. For the Earth as a whole, the heat budget is balanced. Write each point on a new line, with the key term first. When you finish, we go to the next slide.</a:t>
+              <a:t>Let us copy The Global Heat Budget. For the Earth as a whole, the heat budget is balanced. On this slide we have Incoming radiation. Write each point on a new line, with the key term first, and explain it in your own words when we revise. When you finish, we go to the next slide.</a:t>
             </a:r>
             <a:endParaRPr lang="en-US" dirty="0"/>
           </a:p>
@@ -3199,7 +3199,7 @@
           <a:p>
             <a:r>
               <a:rPr lang="en-US" dirty="0"/>
-              <a:t>We continue with the same part. Write each point on a new line, with the key term first.</a:t>
+              <a:t>We continue with The Global Heat Budget. On this slide we have Outgoing radiation. Write each point on a new line, with the key term first, and explain it in your own words when we revise.</a:t>
             </a:r>
             <a:endParaRPr lang="en-US" dirty="0"/>
           </a:p>
@@ -3375,7 +3375,7 @@
           <a:p>
             <a:r>
               <a:rPr lang="en-US" dirty="0"/>
-              <a:t>Let us copy Positive and Negative Balance. The balance is not the same at all latitudes. Write each point on a new line, with the key term first. When you finish, we go to the next slide.</a:t>
+              <a:t>Let us copy Positive and Negative Balance. The balance is not the same at all latitudes. On this slide we have Surplus zone. Write each point on a new line, with the key term first, and explain it in your own words when we revise. When you finish, we go to the next slide.</a:t>
             </a:r>
             <a:endParaRPr lang="en-US" dirty="0"/>
           </a:p>
@@ -3551,7 +3551,7 @@
           <a:p>
             <a:r>
               <a:rPr lang="en-US" dirty="0"/>
-              <a:t>We continue with the same part. Write each point on a new line, with the key term first.</a:t>
+              <a:t>We continue with Positive and Negative Balance. On this slide we have Deficit zones. Write each point on a new line, with the key term first, and explain it in your own words when we revise.</a:t>
             </a:r>
             <a:endParaRPr lang="en-US" dirty="0"/>
           </a:p>
@@ -3727,7 +3727,7 @@
           <a:p>
             <a:r>
               <a:rPr lang="en-US" dirty="0"/>
-              <a:t>Let us copy Reasons for the Differences. The main reasons for these differences are. Write each point on a new line, with the key term first. When you finish, we go to the next slide.</a:t>
+              <a:t>Let us copy Reasons for the Differences. The main reasons for these differences are. On this slide we have Angle of the sun's rays. Write each point on a new line, with the key term first, and explain it in your own words when we revise. When you finish, we go to the next slide.</a:t>
             </a:r>
             <a:endParaRPr lang="en-US" dirty="0"/>
           </a:p>
@@ -3815,7 +3815,7 @@
           <a:p>
             <a:r>
               <a:rPr lang="en-US" dirty="0"/>
-              <a:t>We continue with the same part. Write each point on a new line, with the key term first. When you finish, we go to the next slide.</a:t>
+              <a:t>We continue with Reasons for the Differences. On this slide we have Thickness of atmosphere crossed. Write each point on a new line, with the key term first, and explain it in your own words when we revise. When you finish, we go to the next slide.</a:t>
             </a:r>
             <a:endParaRPr lang="en-US" dirty="0"/>
           </a:p>
@@ -3903,7 +3903,7 @@
           <a:p>
             <a:r>
               <a:rPr lang="en-US" dirty="0"/>
-              <a:t>We continue with the same part. Write each point on a new line, with the key term first.</a:t>
+              <a:t>We continue with Reasons for the Differences. On this slide we have Albedo and day length. Write each point on a new line, with the key term first, and explain it in your own words when we revise.</a:t>
             </a:r>
             <a:endParaRPr lang="en-US" dirty="0"/>
           </a:p>
@@ -3991,7 +3991,7 @@
           <a:p>
             <a:r>
               <a:rPr lang="en-US" dirty="0"/>
-              <a:t>Let us copy Balancing Mechanisms. Heat is moved from the surplus zone to the deficit zones by. Write each point on a new line, with the key term first. When you finish, we go to the next slide.</a:t>
+              <a:t>Let us copy Balancing Mechanisms. Heat is moved from the surplus zone to the deficit zones by. On this slide we have Winds and air masses. Write each point on a new line, with the key term first, and explain it in your own words when we revise. When you finish, we go to the next slide.</a:t>
             </a:r>
             <a:endParaRPr lang="en-US" dirty="0"/>
           </a:p>
@@ -4079,7 +4079,7 @@
           <a:p>
             <a:r>
               <a:rPr lang="en-US" dirty="0"/>
-              <a:t>We continue with the same part. Write each point on a new line, with the key term first.</a:t>
+              <a:t>We continue with Balancing Mechanisms. On this slide we have Ocean currents and Storms and latent heat. Write each point on a new line, with the key term first, and explain it in your own words when we revise.</a:t>
             </a:r>
             <a:endParaRPr lang="en-US" dirty="0"/>
           </a:p>
@@ -5311,7 +5311,7 @@
           <a:p>
             <a:r>
               <a:rPr lang="en-US" dirty="0"/>
-              <a:t>Here is the plan of our lesson today. We shall correction of the homework; then objectives and recall; then real-life situation and action to take; then learning activities; then board summary; then evaluation, remediation and homework.</a:t>
+              <a:t>Here is the plan of our lesson today. First, we shall correct the homework. Then we shall look at the objectives and recall what you already know. After that, we shall study a situation from real life and the action to take, and do the learning activities. Finally, we shall copy the board summary, do the evaluation and the remediation, and I will give you the homework.</a:t>
             </a:r>
             <a:endParaRPr lang="en-US" dirty="0"/>
           </a:p>
@@ -6851,7 +6851,7 @@
                 <a:ea typeface="Times New Roman" pitchFamily="34" charset="-122"/>
                 <a:cs typeface="Times New Roman" pitchFamily="34" charset="-120"/>
               </a:rPr>
-              <a:t>Lesson 4: The Earth's Radiation Balance</a:t>
+              <a:t>Lesson 4</a:t>
             </a:r>
             <a:endParaRPr lang="en-US" sz="2600" dirty="0"/>
           </a:p>
